--- a/GroundTruth/updatetheme_GroundTruthA.pptx
+++ b/GroundTruth/updatetheme_GroundTruthA.pptx
@@ -31247,7 +31247,9 @@
             <a:avLst/>
           </a:prstGeom>
           <a:solidFill>
-            <a:srgbClr val="FFFFFF"/>
+            <a:schemeClr val="accent2">
+              <a:lumMod val="75000"/>
+            </a:schemeClr>
           </a:solidFill>
           <a:ln w="31750">
             <a:solidFill>
@@ -31306,11 +31308,7 @@
           <a:prstGeom prst="ellipse">
             <a:avLst/>
           </a:prstGeom>
-          <a:solidFill>
-            <a:schemeClr val="accent2">
-              <a:lumMod val="75000"/>
-            </a:schemeClr>
-          </a:solidFill>
+          <a:noFill/>
           <a:ln>
             <a:noFill/>
           </a:ln>
@@ -32099,7 +32097,9 @@
             <a:avLst/>
           </a:prstGeom>
           <a:solidFill>
-            <a:srgbClr val="FFFFFF"/>
+            <a:schemeClr val="accent2">
+              <a:lumMod val="75000"/>
+            </a:schemeClr>
           </a:solidFill>
           <a:ln w="31750">
             <a:solidFill>
@@ -32152,11 +32152,7 @@
           <a:prstGeom prst="ellipse">
             <a:avLst/>
           </a:prstGeom>
-          <a:solidFill>
-            <a:schemeClr val="accent2">
-              <a:lumMod val="75000"/>
-            </a:schemeClr>
-          </a:solidFill>
+          <a:noFill/>
           <a:ln>
             <a:noFill/>
           </a:ln>
@@ -33101,7 +33097,9 @@
             <a:avLst/>
           </a:prstGeom>
           <a:solidFill>
-            <a:srgbClr val="FFFFFF"/>
+            <a:schemeClr val="accent2">
+              <a:lumMod val="75000"/>
+            </a:schemeClr>
           </a:solidFill>
           <a:ln w="31750">
             <a:solidFill>
@@ -33154,11 +33152,7 @@
           <a:prstGeom prst="ellipse">
             <a:avLst/>
           </a:prstGeom>
-          <a:solidFill>
-            <a:schemeClr val="accent2">
-              <a:lumMod val="75000"/>
-            </a:schemeClr>
-          </a:solidFill>
+          <a:noFill/>
           <a:ln>
             <a:noFill/>
           </a:ln>
@@ -33538,6 +33532,138 @@
       </p:grpSpPr>
       <p:sp>
         <p:nvSpPr>
+          <p:cNvPr id="901" name="Rectangle 47111">
+            <a:extLst>
+              <a:ext uri="{FF2B5EF4-FFF2-40B4-BE49-F238E27FC236}">
+                <a16:creationId xmlns:a16="http://schemas.microsoft.com/office/drawing/2014/main" id="{2AEFFFF2-9EB4-4B6C-B9F8-2BA3EF89A21C}"/>
+              </a:ext>
+              <a:ext uri="{C183D7F6-B498-43B3-948B-1728B52AA6E4}">
+                <adec:decorative xmlns:adec="http://schemas.microsoft.com/office/drawing/2017/decorative" val="1"/>
+              </a:ext>
+            </a:extLst>
+          </p:cNvPr>
+          <p:cNvSpPr>
+            <a:spLocks noGrp="1" noRot="1" noChangeAspect="1" noMove="1" noResize="1" noEditPoints="1" noAdjustHandles="1" noChangeArrowheads="1" noChangeShapeType="1" noTextEdit="1"/>
+          </p:cNvSpPr>
+          <p:nvPr>
+            <p:extLst>
+              <p:ext uri="{386F3935-93C4-4BCD-93E2-E3B085C9AB24}">
+                <p16:designElem xmlns:p16="http://schemas.microsoft.com/office/powerpoint/2015/main" val="1"/>
+              </p:ext>
+            </p:extLst>
+          </p:nvPr>
+        </p:nvSpPr>
+        <p:spPr>
+          <a:xfrm>
+            <a:off x="1" y="0"/>
+            <a:ext cx="3070172" cy="6858000"/>
+          </a:xfrm>
+          <a:prstGeom prst="rect">
+            <a:avLst/>
+          </a:prstGeom>
+          <a:solidFill>
+            <a:schemeClr val="tx2"/>
+          </a:solidFill>
+          <a:ln>
+            <a:noFill/>
+          </a:ln>
+        </p:spPr>
+        <p:style>
+          <a:lnRef idx="2">
+            <a:schemeClr val="accent1">
+              <a:shade val="50000"/>
+            </a:schemeClr>
+          </a:lnRef>
+          <a:fillRef idx="1">
+            <a:schemeClr val="accent1"/>
+          </a:fillRef>
+          <a:effectRef idx="0">
+            <a:schemeClr val="accent1"/>
+          </a:effectRef>
+          <a:fontRef idx="minor">
+            <a:schemeClr val="lt1"/>
+          </a:fontRef>
+        </p:style>
+        <p:txBody>
+          <a:bodyPr rtlCol="0" anchor="ctr"/>
+          <a:lstStyle/>
+          <a:p>
+            <a:pPr algn="ctr"/>
+            <a:endParaRPr lang="en-US"/>
+          </a:p>
+        </p:txBody>
+      </p:sp>
+      <p:sp>
+        <p:nvSpPr>
+          <p:cNvPr id="902" name="Oval 47108">
+            <a:extLst>
+              <a:ext uri="{FF2B5EF4-FFF2-40B4-BE49-F238E27FC236}">
+                <a16:creationId xmlns:a16="http://schemas.microsoft.com/office/drawing/2014/main" id="{BAC87F6E-526A-49B5-995D-42DB656594C9}"/>
+              </a:ext>
+              <a:ext uri="{C183D7F6-B498-43B3-948B-1728B52AA6E4}">
+                <adec:decorative xmlns:adec="http://schemas.microsoft.com/office/drawing/2017/decorative" val="1"/>
+              </a:ext>
+            </a:extLst>
+          </p:cNvPr>
+          <p:cNvSpPr>
+            <a:spLocks noGrp="1" noRot="1" noChangeAspect="1" noMove="1" noResize="1" noEditPoints="1" noAdjustHandles="1" noChangeArrowheads="1" noChangeShapeType="1" noTextEdit="1"/>
+          </p:cNvSpPr>
+          <p:nvPr>
+            <p:extLst>
+              <p:ext uri="{386F3935-93C4-4BCD-93E2-E3B085C9AB24}">
+                <p16:designElem xmlns:p16="http://schemas.microsoft.com/office/powerpoint/2015/main" val="1"/>
+              </p:ext>
+            </p:extLst>
+          </p:nvPr>
+        </p:nvSpPr>
+        <p:spPr>
+          <a:xfrm>
+            <a:off x="1117423" y="1443035"/>
+            <a:ext cx="3971932" cy="3971930"/>
+          </a:xfrm>
+          <a:prstGeom prst="ellipse">
+            <a:avLst/>
+          </a:prstGeom>
+          <a:solidFill>
+            <a:schemeClr val="accent2">
+              <a:lumMod val="75000"/>
+            </a:schemeClr>
+          </a:solidFill>
+          <a:ln w="31750">
+            <a:solidFill>
+              <a:schemeClr val="accent2">
+                <a:lumMod val="75000"/>
+              </a:schemeClr>
+            </a:solidFill>
+          </a:ln>
+        </p:spPr>
+        <p:style>
+          <a:lnRef idx="2">
+            <a:schemeClr val="accent1">
+              <a:shade val="50000"/>
+            </a:schemeClr>
+          </a:lnRef>
+          <a:fillRef idx="1">
+            <a:schemeClr val="accent1"/>
+          </a:fillRef>
+          <a:effectRef idx="0">
+            <a:schemeClr val="accent1"/>
+          </a:effectRef>
+          <a:fontRef idx="minor">
+            <a:schemeClr val="lt1"/>
+          </a:fontRef>
+        </p:style>
+        <p:txBody>
+          <a:bodyPr rtlCol="0" anchor="ctr"/>
+          <a:lstStyle/>
+          <a:p>
+            <a:pPr algn="ctr"/>
+            <a:endParaRPr lang="en-US"/>
+          </a:p>
+        </p:txBody>
+      </p:sp>
+      <p:sp>
+        <p:nvSpPr>
           <p:cNvPr id="2" name="Title 1">
             <a:extLst>
               <a:ext uri="{FF2B5EF4-FFF2-40B4-BE49-F238E27FC236}">
@@ -33560,11 +33686,7 @@
           <a:prstGeom prst="ellipse">
             <a:avLst/>
           </a:prstGeom>
-          <a:solidFill>
-            <a:schemeClr val="accent2">
-              <a:lumMod val="75000"/>
-            </a:schemeClr>
-          </a:solidFill>
+          <a:noFill/>
           <a:ln>
             <a:noFill/>
           </a:ln>
@@ -36870,83 +36992,6 @@
           </a:p>
         </p:txBody>
       </p:sp>
-      <p:sp>
-        <p:nvSpPr>
-          <p:cNvPr id="7" name="Slide Number Placeholder 6"/>
-          <p:cNvSpPr>
-            <a:spLocks noGrp="1"/>
-          </p:cNvSpPr>
-          <p:nvPr>
-            <p:ph type="sldNum" sz="quarter" idx="12"/>
-          </p:nvPr>
-        </p:nvSpPr>
-        <p:spPr>
-          <a:xfrm>
-            <a:off x="10758922" y="6217920"/>
-            <a:ext cx="365760" cy="365760"/>
-          </a:xfrm>
-        </p:spPr>
-        <p:txBody>
-          <a:bodyPr>
-            <a:normAutofit/>
-          </a:bodyPr>
-          <a:lstStyle/>
-          <a:p>
-            <a:pPr>
-              <a:lnSpc>
-                <a:spcPct val="90000"/>
-              </a:lnSpc>
-              <a:spcAft>
-                <a:spcPts val="600"/>
-              </a:spcAft>
-            </a:pPr>
-            <a:fld id="{8A7A6979-0714-4377-B894-6BE4C2D6E202}" type="slidenum">
-              <a:rPr lang="en-US" smtClean="0"/>
-              <a:pPr>
-                <a:lnSpc>
-                  <a:spcPct val="90000"/>
-                </a:lnSpc>
-                <a:spcAft>
-                  <a:spcPts val="600"/>
-                </a:spcAft>
-              </a:pPr>
-              <a:t>16</a:t>
-            </a:fld>
-            <a:endParaRPr lang="en-US"/>
-          </a:p>
-        </p:txBody>
-      </p:sp>
-      <p:graphicFrame>
-        <p:nvGraphicFramePr>
-          <p:cNvPr id="9" name="Content Placeholder 2">
-            <a:extLst>
-              <a:ext uri="{FF2B5EF4-FFF2-40B4-BE49-F238E27FC236}">
-                <a16:creationId xmlns:a16="http://schemas.microsoft.com/office/drawing/2014/main" id="{5DF96D67-28E5-500D-3DFA-FC010E881D8A}"/>
-              </a:ext>
-            </a:extLst>
-          </p:cNvPr>
-          <p:cNvGraphicFramePr>
-            <a:graphicFrameLocks noGrp="1"/>
-          </p:cNvGraphicFramePr>
-          <p:nvPr>
-            <p:ph idx="1"/>
-            <p:extLst>
-              <p:ext uri="{D42A27DB-BD31-4B8C-83A1-F6EECF244321}">
-                <p14:modId xmlns:p14="http://schemas.microsoft.com/office/powerpoint/2010/main" val="791981041"/>
-              </p:ext>
-            </p:extLst>
-          </p:nvPr>
-        </p:nvGraphicFramePr>
-        <p:xfrm>
-          <a:off x="5619750" y="965200"/>
-          <a:ext cx="5607050" cy="4927600"/>
-        </p:xfrm>
-        <a:graphic>
-          <a:graphicData uri="http://schemas.openxmlformats.org/drawingml/2006/diagram">
-            <dgm:relIds xmlns:dgm="http://schemas.openxmlformats.org/drawingml/2006/diagram" xmlns:r="http://schemas.openxmlformats.org/officeDocument/2006/relationships" r:dm="rId2" r:lo="rId3" r:qs="rId4" r:cs="rId5"/>
-          </a:graphicData>
-        </a:graphic>
-      </p:graphicFrame>
     </p:spTree>
     <p:extLst>
       <p:ext uri="{BB962C8B-B14F-4D97-AF65-F5344CB8AC3E}">
@@ -37140,7 +37185,9 @@
             <a:avLst/>
           </a:prstGeom>
           <a:solidFill>
-            <a:srgbClr val="FFFFFF"/>
+            <a:schemeClr val="accent2">
+              <a:lumMod val="75000"/>
+            </a:schemeClr>
           </a:solidFill>
           <a:ln w="31750">
             <a:solidFill>
@@ -37193,11 +37240,7 @@
           <a:prstGeom prst="ellipse">
             <a:avLst/>
           </a:prstGeom>
-          <a:solidFill>
-            <a:schemeClr val="accent2">
-              <a:lumMod val="75000"/>
-            </a:schemeClr>
-          </a:solidFill>
+          <a:noFill/>
           <a:ln>
             <a:noFill/>
           </a:ln>
@@ -38102,7 +38145,7 @@
                   <a:r>
                     <a:rPr lang="en-US" sz="1500" b="1" dirty="0">
                       <a:solidFill>
-                        <a:srgbClr val="800000"/>
+                        <a:srgbClr val="000000"/>
                       </a:solidFill>
                       <a:ea typeface="ＭＳ Ｐゴシック" charset="0"/>
                       <a:cs typeface="ＭＳ Ｐゴシック" charset="0"/>
@@ -38115,7 +38158,7 @@
                   <a:r>
                     <a:rPr lang="en-US" sz="1500" b="1" dirty="0">
                       <a:solidFill>
-                        <a:srgbClr val="800000"/>
+                        <a:srgbClr val="000000"/>
                       </a:solidFill>
                       <a:ea typeface="ＭＳ Ｐゴシック" charset="0"/>
                       <a:cs typeface="ＭＳ Ｐゴシック" charset="0"/>
@@ -38234,7 +38277,7 @@
                   <a:r>
                     <a:rPr lang="en-US" sz="1500" b="1" dirty="0">
                       <a:solidFill>
-                        <a:srgbClr val="800000"/>
+                        <a:srgbClr val="000000"/>
                       </a:solidFill>
                       <a:ea typeface="ＭＳ Ｐゴシック" charset="0"/>
                       <a:cs typeface="ＭＳ Ｐゴシック" charset="0"/>
@@ -38247,7 +38290,7 @@
                   <a:r>
                     <a:rPr lang="en-US" sz="1500" b="1" dirty="0">
                       <a:solidFill>
-                        <a:srgbClr val="800000"/>
+                        <a:srgbClr val="000000"/>
                       </a:solidFill>
                       <a:ea typeface="ＭＳ Ｐゴシック" charset="0"/>
                       <a:cs typeface="ＭＳ Ｐゴシック" charset="0"/>
@@ -38482,7 +38525,7 @@
                       <a:r>
                         <a:rPr lang="en-US" sz="1500" b="1" dirty="0">
                           <a:solidFill>
-                            <a:schemeClr val="accent1"/>
+                            <a:srgbClr val="000000"/>
                           </a:solidFill>
                           <a:ea typeface="ＭＳ Ｐゴシック" charset="0"/>
                           <a:cs typeface="ＭＳ Ｐゴシック" charset="0"/>
@@ -38495,7 +38538,7 @@
                       <a:r>
                         <a:rPr lang="en-US" sz="1500" b="1" dirty="0">
                           <a:solidFill>
-                            <a:schemeClr val="accent1"/>
+                            <a:srgbClr val="000000"/>
                           </a:solidFill>
                           <a:ea typeface="ＭＳ Ｐゴシック" charset="0"/>
                           <a:cs typeface="ＭＳ Ｐゴシック" charset="0"/>
@@ -39737,7 +39780,7 @@
                         <a:r>
                           <a:rPr lang="en-US" sz="1500" b="1" dirty="0">
                             <a:solidFill>
-                              <a:schemeClr val="accent1"/>
+                              <a:srgbClr val="000000"/>
                             </a:solidFill>
                             <a:ea typeface="ＭＳ Ｐゴシック" charset="0"/>
                             <a:cs typeface="ＭＳ Ｐゴシック" charset="0"/>
@@ -40931,7 +40974,9 @@
             <a:avLst/>
           </a:prstGeom>
           <a:solidFill>
-            <a:srgbClr val="FFFFFF"/>
+            <a:schemeClr val="accent2">
+              <a:lumMod val="75000"/>
+            </a:schemeClr>
           </a:solidFill>
           <a:ln w="31750">
             <a:solidFill>
@@ -40984,11 +41029,7 @@
           <a:prstGeom prst="ellipse">
             <a:avLst/>
           </a:prstGeom>
-          <a:solidFill>
-            <a:schemeClr val="accent2">
-              <a:lumMod val="75000"/>
-            </a:schemeClr>
-          </a:solidFill>
+          <a:noFill/>
           <a:ln>
             <a:noFill/>
           </a:ln>
@@ -41845,83 +41886,6 @@
           </a:p>
         </p:txBody>
       </p:sp>
-      <p:sp>
-        <p:nvSpPr>
-          <p:cNvPr id="7" name="Slide Number Placeholder 6"/>
-          <p:cNvSpPr>
-            <a:spLocks noGrp="1"/>
-          </p:cNvSpPr>
-          <p:nvPr>
-            <p:ph type="sldNum" sz="quarter" idx="12"/>
-          </p:nvPr>
-        </p:nvSpPr>
-        <p:spPr>
-          <a:xfrm>
-            <a:off x="10758922" y="6217920"/>
-            <a:ext cx="365760" cy="365760"/>
-          </a:xfrm>
-        </p:spPr>
-        <p:txBody>
-          <a:bodyPr>
-            <a:normAutofit/>
-          </a:bodyPr>
-          <a:lstStyle/>
-          <a:p>
-            <a:pPr>
-              <a:lnSpc>
-                <a:spcPct val="90000"/>
-              </a:lnSpc>
-              <a:spcAft>
-                <a:spcPts val="600"/>
-              </a:spcAft>
-            </a:pPr>
-            <a:fld id="{8A7A6979-0714-4377-B894-6BE4C2D6E202}" type="slidenum">
-              <a:rPr lang="en-US" smtClean="0"/>
-              <a:pPr>
-                <a:lnSpc>
-                  <a:spcPct val="90000"/>
-                </a:lnSpc>
-                <a:spcAft>
-                  <a:spcPts val="600"/>
-                </a:spcAft>
-              </a:pPr>
-              <a:t>20</a:t>
-            </a:fld>
-            <a:endParaRPr lang="en-US"/>
-          </a:p>
-        </p:txBody>
-      </p:sp>
-      <p:graphicFrame>
-        <p:nvGraphicFramePr>
-          <p:cNvPr id="9" name="Content Placeholder 2">
-            <a:extLst>
-              <a:ext uri="{FF2B5EF4-FFF2-40B4-BE49-F238E27FC236}">
-                <a16:creationId xmlns:a16="http://schemas.microsoft.com/office/drawing/2014/main" id="{0F0AD4E9-5E82-5C63-1453-F2040950D169}"/>
-              </a:ext>
-            </a:extLst>
-          </p:cNvPr>
-          <p:cNvGraphicFramePr>
-            <a:graphicFrameLocks noGrp="1"/>
-          </p:cNvGraphicFramePr>
-          <p:nvPr>
-            <p:ph idx="1"/>
-            <p:extLst>
-              <p:ext uri="{D42A27DB-BD31-4B8C-83A1-F6EECF244321}">
-                <p14:modId xmlns:p14="http://schemas.microsoft.com/office/powerpoint/2010/main" val="2829301450"/>
-              </p:ext>
-            </p:extLst>
-          </p:nvPr>
-        </p:nvGraphicFramePr>
-        <p:xfrm>
-          <a:off x="5619750" y="965200"/>
-          <a:ext cx="5607050" cy="4927600"/>
-        </p:xfrm>
-        <a:graphic>
-          <a:graphicData uri="http://schemas.openxmlformats.org/drawingml/2006/diagram">
-            <dgm:relIds xmlns:dgm="http://schemas.openxmlformats.org/drawingml/2006/diagram" xmlns:r="http://schemas.openxmlformats.org/officeDocument/2006/relationships" r:dm="rId2" r:lo="rId3" r:qs="rId4" r:cs="rId5"/>
-          </a:graphicData>
-        </a:graphic>
-      </p:graphicFrame>
     </p:spTree>
     <p:extLst>
       <p:ext uri="{BB962C8B-B14F-4D97-AF65-F5344CB8AC3E}">
@@ -42115,7 +42079,9 @@
             <a:avLst/>
           </a:prstGeom>
           <a:solidFill>
-            <a:srgbClr val="FFFFFF"/>
+            <a:schemeClr val="accent2">
+              <a:lumMod val="75000"/>
+            </a:schemeClr>
           </a:solidFill>
           <a:ln w="31750">
             <a:solidFill>
@@ -42168,11 +42134,7 @@
           <a:prstGeom prst="ellipse">
             <a:avLst/>
           </a:prstGeom>
-          <a:solidFill>
-            <a:schemeClr val="accent2">
-              <a:lumMod val="75000"/>
-            </a:schemeClr>
-          </a:solidFill>
+          <a:noFill/>
           <a:ln>
             <a:noFill/>
           </a:ln>
@@ -43165,83 +43127,6 @@
           </a:p>
         </p:txBody>
       </p:sp>
-      <p:sp>
-        <p:nvSpPr>
-          <p:cNvPr id="7" name="Slide Number Placeholder 6"/>
-          <p:cNvSpPr>
-            <a:spLocks noGrp="1"/>
-          </p:cNvSpPr>
-          <p:nvPr>
-            <p:ph type="sldNum" sz="quarter" idx="12"/>
-          </p:nvPr>
-        </p:nvSpPr>
-        <p:spPr>
-          <a:xfrm>
-            <a:off x="10758922" y="6217920"/>
-            <a:ext cx="365760" cy="365760"/>
-          </a:xfrm>
-        </p:spPr>
-        <p:txBody>
-          <a:bodyPr>
-            <a:normAutofit/>
-          </a:bodyPr>
-          <a:lstStyle/>
-          <a:p>
-            <a:pPr>
-              <a:lnSpc>
-                <a:spcPct val="90000"/>
-              </a:lnSpc>
-              <a:spcAft>
-                <a:spcPts val="600"/>
-              </a:spcAft>
-            </a:pPr>
-            <a:fld id="{8A7A6979-0714-4377-B894-6BE4C2D6E202}" type="slidenum">
-              <a:rPr lang="en-US" smtClean="0"/>
-              <a:pPr>
-                <a:lnSpc>
-                  <a:spcPct val="90000"/>
-                </a:lnSpc>
-                <a:spcAft>
-                  <a:spcPts val="600"/>
-                </a:spcAft>
-              </a:pPr>
-              <a:t>22</a:t>
-            </a:fld>
-            <a:endParaRPr lang="en-US"/>
-          </a:p>
-        </p:txBody>
-      </p:sp>
-      <p:graphicFrame>
-        <p:nvGraphicFramePr>
-          <p:cNvPr id="9" name="Content Placeholder 2">
-            <a:extLst>
-              <a:ext uri="{FF2B5EF4-FFF2-40B4-BE49-F238E27FC236}">
-                <a16:creationId xmlns:a16="http://schemas.microsoft.com/office/drawing/2014/main" id="{0A0749F0-240C-056E-91D4-E9D0DC018A28}"/>
-              </a:ext>
-            </a:extLst>
-          </p:cNvPr>
-          <p:cNvGraphicFramePr>
-            <a:graphicFrameLocks noGrp="1"/>
-          </p:cNvGraphicFramePr>
-          <p:nvPr>
-            <p:ph idx="1"/>
-            <p:extLst>
-              <p:ext uri="{D42A27DB-BD31-4B8C-83A1-F6EECF244321}">
-                <p14:modId xmlns:p14="http://schemas.microsoft.com/office/powerpoint/2010/main" val="3382028019"/>
-              </p:ext>
-            </p:extLst>
-          </p:nvPr>
-        </p:nvGraphicFramePr>
-        <p:xfrm>
-          <a:off x="5619750" y="965200"/>
-          <a:ext cx="5607050" cy="4927600"/>
-        </p:xfrm>
-        <a:graphic>
-          <a:graphicData uri="http://schemas.openxmlformats.org/drawingml/2006/diagram">
-            <dgm:relIds xmlns:dgm="http://schemas.openxmlformats.org/drawingml/2006/diagram" xmlns:r="http://schemas.openxmlformats.org/officeDocument/2006/relationships" r:dm="rId2" r:lo="rId3" r:qs="rId4" r:cs="rId5"/>
-          </a:graphicData>
-        </a:graphic>
-      </p:graphicFrame>
     </p:spTree>
     <p:extLst>
       <p:ext uri="{BB962C8B-B14F-4D97-AF65-F5344CB8AC3E}">
@@ -43435,7 +43320,9 @@
             <a:avLst/>
           </a:prstGeom>
           <a:solidFill>
-            <a:srgbClr val="FFFFFF"/>
+            <a:schemeClr val="accent2">
+              <a:lumMod val="75000"/>
+            </a:schemeClr>
           </a:solidFill>
           <a:ln w="31750">
             <a:solidFill>
@@ -43488,11 +43375,7 @@
           <a:prstGeom prst="ellipse">
             <a:avLst/>
           </a:prstGeom>
-          <a:solidFill>
-            <a:schemeClr val="accent2">
-              <a:lumMod val="75000"/>
-            </a:schemeClr>
-          </a:solidFill>
+          <a:noFill/>
           <a:ln>
             <a:noFill/>
           </a:ln>
@@ -44005,150 +43888,6 @@
           </a:p>
         </p:txBody>
       </p:sp>
-      <p:sp>
-        <p:nvSpPr>
-          <p:cNvPr id="3" name="Content Placeholder 2"/>
-          <p:cNvSpPr>
-            <a:spLocks noGrp="1"/>
-          </p:cNvSpPr>
-          <p:nvPr>
-            <p:ph idx="1"/>
-          </p:nvPr>
-        </p:nvSpPr>
-        <p:spPr>
-          <a:xfrm>
-            <a:off x="7394948" y="369147"/>
-            <a:ext cx="3363974" cy="3415622"/>
-          </a:xfrm>
-        </p:spPr>
-        <p:txBody>
-          <a:bodyPr>
-            <a:normAutofit/>
-          </a:bodyPr>
-          <a:lstStyle/>
-          <a:p>
-            <a:pPr marL="0" indent="0">
-              <a:buNone/>
-            </a:pPr>
-            <a:r>
-              <a:rPr lang="en-US" dirty="0">
-                <a:solidFill>
-                  <a:schemeClr val="bg1"/>
-                </a:solidFill>
-                <a:latin typeface="Times" charset="0"/>
-                <a:ea typeface="Times" charset="0"/>
-                <a:cs typeface="Times" charset="0"/>
-              </a:rPr>
-              <a:t>PART V</a:t>
-            </a:r>
-          </a:p>
-          <a:p>
-            <a:pPr marL="0" indent="0">
-              <a:buNone/>
-            </a:pPr>
-            <a:endParaRPr lang="en-US" u="sng" dirty="0">
-              <a:solidFill>
-                <a:schemeClr val="bg1"/>
-              </a:solidFill>
-              <a:latin typeface="Times" charset="0"/>
-              <a:ea typeface="Times" charset="0"/>
-              <a:cs typeface="Times" charset="0"/>
-            </a:endParaRPr>
-          </a:p>
-          <a:p>
-            <a:pPr marL="0" indent="0">
-              <a:buNone/>
-            </a:pPr>
-            <a:r>
-              <a:rPr lang="en-US" dirty="0">
-                <a:solidFill>
-                  <a:schemeClr val="bg1"/>
-                </a:solidFill>
-                <a:latin typeface="Times" charset="0"/>
-                <a:ea typeface="Times" charset="0"/>
-                <a:cs typeface="Times" charset="0"/>
-              </a:rPr>
-              <a:t>Open Problems</a:t>
-            </a:r>
-          </a:p>
-        </p:txBody>
-      </p:sp>
-      <p:sp>
-        <p:nvSpPr>
-          <p:cNvPr id="7" name="Slide Number Placeholder 6"/>
-          <p:cNvSpPr>
-            <a:spLocks noGrp="1"/>
-          </p:cNvSpPr>
-          <p:nvPr>
-            <p:ph type="sldNum" sz="quarter" idx="12"/>
-          </p:nvPr>
-        </p:nvSpPr>
-        <p:spPr>
-          <a:xfrm>
-            <a:off x="10758922" y="6217920"/>
-            <a:ext cx="365760" cy="365760"/>
-          </a:xfrm>
-        </p:spPr>
-        <p:txBody>
-          <a:bodyPr>
-            <a:normAutofit/>
-          </a:bodyPr>
-          <a:lstStyle/>
-          <a:p>
-            <a:pPr>
-              <a:lnSpc>
-                <a:spcPct val="90000"/>
-              </a:lnSpc>
-              <a:spcAft>
-                <a:spcPts val="600"/>
-              </a:spcAft>
-            </a:pPr>
-            <a:fld id="{8A7A6979-0714-4377-B894-6BE4C2D6E202}" type="slidenum">
-              <a:rPr lang="en-US" smtClean="0"/>
-              <a:pPr>
-                <a:lnSpc>
-                  <a:spcPct val="90000"/>
-                </a:lnSpc>
-                <a:spcAft>
-                  <a:spcPts val="600"/>
-                </a:spcAft>
-              </a:pPr>
-              <a:t>24</a:t>
-            </a:fld>
-            <a:endParaRPr lang="en-US"/>
-          </a:p>
-        </p:txBody>
-      </p:sp>
-      <p:graphicFrame>
-        <p:nvGraphicFramePr>
-          <p:cNvPr id="6" name="Content Placeholder 2">
-            <a:extLst>
-              <a:ext uri="{FF2B5EF4-FFF2-40B4-BE49-F238E27FC236}">
-                <a16:creationId xmlns:a16="http://schemas.microsoft.com/office/drawing/2014/main" id="{B987AA01-C9D3-D34E-628D-502B6712F22A}"/>
-              </a:ext>
-            </a:extLst>
-          </p:cNvPr>
-          <p:cNvGraphicFramePr>
-            <a:graphicFrameLocks/>
-          </p:cNvGraphicFramePr>
-          <p:nvPr>
-            <p:extLst>
-              <p:ext uri="{D42A27DB-BD31-4B8C-83A1-F6EECF244321}">
-                <p14:modId xmlns:p14="http://schemas.microsoft.com/office/powerpoint/2010/main" val="3132108481"/>
-              </p:ext>
-            </p:extLst>
-          </p:nvPr>
-        </p:nvGraphicFramePr>
-        <p:xfrm>
-          <a:off x="5619750" y="965200"/>
-          <a:ext cx="5607050" cy="4927600"/>
-        </p:xfrm>
-        <a:graphic>
-          <a:graphicData uri="http://schemas.openxmlformats.org/drawingml/2006/diagram">
-            <dgm:relIds xmlns:dgm="http://schemas.openxmlformats.org/drawingml/2006/diagram" xmlns:r="http://schemas.openxmlformats.org/officeDocument/2006/relationships" r:dm="rId2" r:lo="rId3" r:qs="rId4" r:cs="rId5"/>
-          </a:graphicData>
-        </a:graphic>
-      </p:graphicFrame>
     </p:spTree>
     <p:extLst>
       <p:ext uri="{BB962C8B-B14F-4D97-AF65-F5344CB8AC3E}">
@@ -44342,7 +44081,9 @@
             <a:avLst/>
           </a:prstGeom>
           <a:solidFill>
-            <a:srgbClr val="FFFFFF"/>
+            <a:schemeClr val="accent2">
+              <a:lumMod val="75000"/>
+            </a:schemeClr>
           </a:solidFill>
           <a:ln w="31750">
             <a:solidFill>
@@ -44395,11 +44136,7 @@
           <a:prstGeom prst="ellipse">
             <a:avLst/>
           </a:prstGeom>
-          <a:solidFill>
-            <a:schemeClr val="accent2">
-              <a:lumMod val="75000"/>
-            </a:schemeClr>
-          </a:solidFill>
+          <a:noFill/>
           <a:ln>
             <a:noFill/>
           </a:ln>
@@ -45248,83 +44985,6 @@
           </a:p>
         </p:txBody>
       </p:sp>
-      <p:sp>
-        <p:nvSpPr>
-          <p:cNvPr id="7" name="Slide Number Placeholder 6"/>
-          <p:cNvSpPr>
-            <a:spLocks noGrp="1"/>
-          </p:cNvSpPr>
-          <p:nvPr>
-            <p:ph type="sldNum" sz="quarter" idx="12"/>
-          </p:nvPr>
-        </p:nvSpPr>
-        <p:spPr>
-          <a:xfrm>
-            <a:off x="10758922" y="6217920"/>
-            <a:ext cx="365760" cy="365760"/>
-          </a:xfrm>
-        </p:spPr>
-        <p:txBody>
-          <a:bodyPr>
-            <a:normAutofit/>
-          </a:bodyPr>
-          <a:lstStyle/>
-          <a:p>
-            <a:pPr>
-              <a:lnSpc>
-                <a:spcPct val="90000"/>
-              </a:lnSpc>
-              <a:spcAft>
-                <a:spcPts val="600"/>
-              </a:spcAft>
-            </a:pPr>
-            <a:fld id="{8A7A6979-0714-4377-B894-6BE4C2D6E202}" type="slidenum">
-              <a:rPr lang="en-US" smtClean="0"/>
-              <a:pPr>
-                <a:lnSpc>
-                  <a:spcPct val="90000"/>
-                </a:lnSpc>
-                <a:spcAft>
-                  <a:spcPts val="600"/>
-                </a:spcAft>
-              </a:pPr>
-              <a:t>26</a:t>
-            </a:fld>
-            <a:endParaRPr lang="en-US"/>
-          </a:p>
-        </p:txBody>
-      </p:sp>
-      <p:graphicFrame>
-        <p:nvGraphicFramePr>
-          <p:cNvPr id="12" name="Content Placeholder 2">
-            <a:extLst>
-              <a:ext uri="{FF2B5EF4-FFF2-40B4-BE49-F238E27FC236}">
-                <a16:creationId xmlns:a16="http://schemas.microsoft.com/office/drawing/2014/main" id="{A40CBB2F-21CE-0CAB-79DB-CD9E6EE668F8}"/>
-              </a:ext>
-            </a:extLst>
-          </p:cNvPr>
-          <p:cNvGraphicFramePr>
-            <a:graphicFrameLocks noGrp="1"/>
-          </p:cNvGraphicFramePr>
-          <p:nvPr>
-            <p:ph idx="1"/>
-            <p:extLst>
-              <p:ext uri="{D42A27DB-BD31-4B8C-83A1-F6EECF244321}">
-                <p14:modId xmlns:p14="http://schemas.microsoft.com/office/powerpoint/2010/main" val="1453844714"/>
-              </p:ext>
-            </p:extLst>
-          </p:nvPr>
-        </p:nvGraphicFramePr>
-        <p:xfrm>
-          <a:off x="5619750" y="965200"/>
-          <a:ext cx="5607050" cy="4927600"/>
-        </p:xfrm>
-        <a:graphic>
-          <a:graphicData uri="http://schemas.openxmlformats.org/drawingml/2006/diagram">
-            <dgm:relIds xmlns:dgm="http://schemas.openxmlformats.org/drawingml/2006/diagram" xmlns:r="http://schemas.openxmlformats.org/officeDocument/2006/relationships" r:dm="rId2" r:lo="rId3" r:qs="rId4" r:cs="rId5"/>
-          </a:graphicData>
-        </a:graphic>
-      </p:graphicFrame>
     </p:spTree>
     <p:extLst>
       <p:ext uri="{BB962C8B-B14F-4D97-AF65-F5344CB8AC3E}">
@@ -48085,83 +47745,6 @@
           </a:p>
         </p:txBody>
       </p:sp>
-      <p:sp>
-        <p:nvSpPr>
-          <p:cNvPr id="7" name="Slide Number Placeholder 6"/>
-          <p:cNvSpPr>
-            <a:spLocks noGrp="1"/>
-          </p:cNvSpPr>
-          <p:nvPr>
-            <p:ph type="sldNum" sz="quarter" idx="12"/>
-          </p:nvPr>
-        </p:nvSpPr>
-        <p:spPr>
-          <a:xfrm>
-            <a:off x="10758922" y="6217920"/>
-            <a:ext cx="365760" cy="365760"/>
-          </a:xfrm>
-        </p:spPr>
-        <p:txBody>
-          <a:bodyPr>
-            <a:normAutofit/>
-          </a:bodyPr>
-          <a:lstStyle/>
-          <a:p>
-            <a:pPr>
-              <a:lnSpc>
-                <a:spcPct val="90000"/>
-              </a:lnSpc>
-              <a:spcAft>
-                <a:spcPts val="600"/>
-              </a:spcAft>
-            </a:pPr>
-            <a:fld id="{8A7A6979-0714-4377-B894-6BE4C2D6E202}" type="slidenum">
-              <a:rPr lang="en-US" smtClean="0"/>
-              <a:pPr>
-                <a:lnSpc>
-                  <a:spcPct val="90000"/>
-                </a:lnSpc>
-                <a:spcAft>
-                  <a:spcPts val="600"/>
-                </a:spcAft>
-              </a:pPr>
-              <a:t>3</a:t>
-            </a:fld>
-            <a:endParaRPr lang="en-US"/>
-          </a:p>
-        </p:txBody>
-      </p:sp>
-      <p:graphicFrame>
-        <p:nvGraphicFramePr>
-          <p:cNvPr id="9" name="Content Placeholder 2">
-            <a:extLst>
-              <a:ext uri="{FF2B5EF4-FFF2-40B4-BE49-F238E27FC236}">
-                <a16:creationId xmlns:a16="http://schemas.microsoft.com/office/drawing/2014/main" id="{1CC644B3-7294-0645-9BFA-2E89C8E4FEE3}"/>
-              </a:ext>
-            </a:extLst>
-          </p:cNvPr>
-          <p:cNvGraphicFramePr>
-            <a:graphicFrameLocks noGrp="1"/>
-          </p:cNvGraphicFramePr>
-          <p:nvPr>
-            <p:ph idx="1"/>
-            <p:extLst>
-              <p:ext uri="{D42A27DB-BD31-4B8C-83A1-F6EECF244321}">
-                <p14:modId xmlns:p14="http://schemas.microsoft.com/office/powerpoint/2010/main" val="1978365277"/>
-              </p:ext>
-            </p:extLst>
-          </p:nvPr>
-        </p:nvGraphicFramePr>
-        <p:xfrm>
-          <a:off x="5619750" y="965200"/>
-          <a:ext cx="5607050" cy="4927600"/>
-        </p:xfrm>
-        <a:graphic>
-          <a:graphicData uri="http://schemas.openxmlformats.org/drawingml/2006/diagram">
-            <dgm:relIds xmlns:dgm="http://schemas.openxmlformats.org/drawingml/2006/diagram" xmlns:r="http://schemas.openxmlformats.org/officeDocument/2006/relationships" r:dm="rId2" r:lo="rId3" r:qs="rId4" r:cs="rId5"/>
-          </a:graphicData>
-        </a:graphic>
-      </p:graphicFrame>
     </p:spTree>
     <p:extLst>
       <p:ext uri="{BB962C8B-B14F-4D97-AF65-F5344CB8AC3E}">
@@ -48355,7 +47938,9 @@
             <a:avLst/>
           </a:prstGeom>
           <a:solidFill>
-            <a:srgbClr val="FFFFFF"/>
+            <a:schemeClr val="accent2">
+              <a:lumMod val="75000"/>
+            </a:schemeClr>
           </a:solidFill>
           <a:ln w="31750">
             <a:solidFill>
@@ -48408,11 +47993,7 @@
           <a:prstGeom prst="ellipse">
             <a:avLst/>
           </a:prstGeom>
-          <a:solidFill>
-            <a:schemeClr val="accent2">
-              <a:lumMod val="75000"/>
-            </a:schemeClr>
-          </a:solidFill>
+          <a:noFill/>
           <a:ln>
             <a:noFill/>
           </a:ln>
@@ -48491,7 +48072,7 @@
             <a:r>
               <a:rPr lang="en-US" sz="2000" dirty="0">
                 <a:solidFill>
-                  <a:schemeClr val="accent3"/>
+                  <a:srgbClr val="000000"/>
                 </a:solidFill>
                 <a:latin typeface="Times" pitchFamily="2" charset="0"/>
                 <a:ea typeface="Times" charset="0"/>
@@ -48532,7 +48113,7 @@
             <a:r>
               <a:rPr lang="en-US" sz="2000" dirty="0">
                 <a:solidFill>
-                  <a:schemeClr val="accent3"/>
+                  <a:srgbClr val="000000"/>
                 </a:solidFill>
                 <a:latin typeface="Times" pitchFamily="2" charset="0"/>
                 <a:ea typeface="Times" charset="0"/>
@@ -48551,7 +48132,7 @@
             <a:r>
               <a:rPr lang="en-US" sz="2000" dirty="0">
                 <a:solidFill>
-                  <a:srgbClr val="7030A0"/>
+                  <a:srgbClr val="000000"/>
                 </a:solidFill>
                 <a:latin typeface="Times" pitchFamily="2" charset="0"/>
                 <a:ea typeface="Times" charset="0"/>
@@ -48570,7 +48151,7 @@
             <a:r>
               <a:rPr lang="en-US" sz="2000" dirty="0">
                 <a:solidFill>
-                  <a:srgbClr val="7030A0"/>
+                  <a:srgbClr val="000000"/>
                 </a:solidFill>
                 <a:latin typeface="Times" pitchFamily="2" charset="0"/>
                 <a:ea typeface="Times" charset="0"/>
@@ -48619,7 +48200,7 @@
             <a:r>
               <a:rPr lang="en-US" sz="2000" dirty="0">
                 <a:solidFill>
-                  <a:schemeClr val="accent3"/>
+                  <a:srgbClr val="000000"/>
                 </a:solidFill>
                 <a:latin typeface="Times" pitchFamily="2" charset="0"/>
                 <a:ea typeface="Times" charset="0"/>
@@ -48663,7 +48244,7 @@
             <a:r>
               <a:rPr lang="en-US" sz="2000" dirty="0">
                 <a:solidFill>
-                  <a:schemeClr val="accent3"/>
+                  <a:srgbClr val="000000"/>
                 </a:solidFill>
                 <a:latin typeface="Times" pitchFamily="2" charset="0"/>
                 <a:ea typeface="Times" charset="0"/>
@@ -49139,7 +48720,9 @@
             <a:avLst/>
           </a:prstGeom>
           <a:solidFill>
-            <a:srgbClr val="FFFFFF"/>
+            <a:schemeClr val="accent2">
+              <a:lumMod val="75000"/>
+            </a:schemeClr>
           </a:solidFill>
           <a:ln w="31750">
             <a:solidFill>
@@ -49192,11 +48775,7 @@
           <a:prstGeom prst="ellipse">
             <a:avLst/>
           </a:prstGeom>
-          <a:solidFill>
-            <a:schemeClr val="accent2">
-              <a:lumMod val="75000"/>
-            </a:schemeClr>
-          </a:solidFill>
+          <a:noFill/>
           <a:ln>
             <a:noFill/>
           </a:ln>
@@ -49341,7 +48920,7 @@
             <a:r>
               <a:rPr lang="en-US" dirty="0">
                 <a:solidFill>
-                  <a:schemeClr val="accent3"/>
+                  <a:srgbClr val="000000"/>
                 </a:solidFill>
                 <a:latin typeface="Times" pitchFamily="2" charset="0"/>
                 <a:ea typeface="Times" charset="0"/>
@@ -49787,7 +49366,9 @@
             <a:avLst/>
           </a:prstGeom>
           <a:solidFill>
-            <a:srgbClr val="FFFFFF"/>
+            <a:schemeClr val="accent2">
+              <a:lumMod val="75000"/>
+            </a:schemeClr>
           </a:solidFill>
           <a:ln w="31750">
             <a:solidFill>
@@ -49840,11 +49421,7 @@
           <a:prstGeom prst="ellipse">
             <a:avLst/>
           </a:prstGeom>
-          <a:solidFill>
-            <a:schemeClr val="accent2">
-              <a:lumMod val="75000"/>
-            </a:schemeClr>
-          </a:solidFill>
+          <a:noFill/>
           <a:ln>
             <a:noFill/>
           </a:ln>
@@ -49923,7 +49500,7 @@
             <a:r>
               <a:rPr lang="en-US" dirty="0">
                 <a:solidFill>
-                  <a:schemeClr val="accent3"/>
+                  <a:srgbClr val="000000"/>
                 </a:solidFill>
                 <a:latin typeface="Times" charset="0"/>
                 <a:ea typeface="Times" charset="0"/>
@@ -49996,7 +49573,7 @@
             <a:r>
               <a:rPr lang="en-US" dirty="0">
                 <a:solidFill>
-                  <a:schemeClr val="accent3"/>
+                  <a:srgbClr val="000000"/>
                 </a:solidFill>
                 <a:latin typeface="Times" charset="0"/>
                 <a:ea typeface="Times" charset="0"/>
@@ -50673,7 +50250,9 @@
             <a:avLst/>
           </a:prstGeom>
           <a:solidFill>
-            <a:srgbClr val="FFFFFF"/>
+            <a:schemeClr val="accent2">
+              <a:lumMod val="75000"/>
+            </a:schemeClr>
           </a:solidFill>
           <a:ln w="31750">
             <a:solidFill>
@@ -50726,11 +50305,7 @@
           <a:prstGeom prst="ellipse">
             <a:avLst/>
           </a:prstGeom>
-          <a:solidFill>
-            <a:schemeClr val="accent2">
-              <a:lumMod val="75000"/>
-            </a:schemeClr>
-          </a:solidFill>
+          <a:noFill/>
           <a:ln>
             <a:noFill/>
           </a:ln>
@@ -51847,83 +51422,6 @@
           </a:p>
         </p:txBody>
       </p:sp>
-      <p:sp>
-        <p:nvSpPr>
-          <p:cNvPr id="7" name="Slide Number Placeholder 6"/>
-          <p:cNvSpPr>
-            <a:spLocks noGrp="1"/>
-          </p:cNvSpPr>
-          <p:nvPr>
-            <p:ph type="sldNum" sz="quarter" idx="12"/>
-          </p:nvPr>
-        </p:nvSpPr>
-        <p:spPr>
-          <a:xfrm>
-            <a:off x="10758922" y="6217920"/>
-            <a:ext cx="365760" cy="365760"/>
-          </a:xfrm>
-        </p:spPr>
-        <p:txBody>
-          <a:bodyPr>
-            <a:normAutofit/>
-          </a:bodyPr>
-          <a:lstStyle/>
-          <a:p>
-            <a:pPr>
-              <a:lnSpc>
-                <a:spcPct val="90000"/>
-              </a:lnSpc>
-              <a:spcAft>
-                <a:spcPts val="600"/>
-              </a:spcAft>
-            </a:pPr>
-            <a:fld id="{8A7A6979-0714-4377-B894-6BE4C2D6E202}" type="slidenum">
-              <a:rPr lang="en-US" smtClean="0"/>
-              <a:pPr>
-                <a:lnSpc>
-                  <a:spcPct val="90000"/>
-                </a:lnSpc>
-                <a:spcAft>
-                  <a:spcPts val="600"/>
-                </a:spcAft>
-              </a:pPr>
-              <a:t>8</a:t>
-            </a:fld>
-            <a:endParaRPr lang="en-US"/>
-          </a:p>
-        </p:txBody>
-      </p:sp>
-      <p:graphicFrame>
-        <p:nvGraphicFramePr>
-          <p:cNvPr id="9" name="Content Placeholder 2">
-            <a:extLst>
-              <a:ext uri="{FF2B5EF4-FFF2-40B4-BE49-F238E27FC236}">
-                <a16:creationId xmlns:a16="http://schemas.microsoft.com/office/drawing/2014/main" id="{0C632355-983C-2A8F-B708-9C7D7AB2B0FD}"/>
-              </a:ext>
-            </a:extLst>
-          </p:cNvPr>
-          <p:cNvGraphicFramePr>
-            <a:graphicFrameLocks noGrp="1"/>
-          </p:cNvGraphicFramePr>
-          <p:nvPr>
-            <p:ph idx="1"/>
-            <p:extLst>
-              <p:ext uri="{D42A27DB-BD31-4B8C-83A1-F6EECF244321}">
-                <p14:modId xmlns:p14="http://schemas.microsoft.com/office/powerpoint/2010/main" val="4006838900"/>
-              </p:ext>
-            </p:extLst>
-          </p:nvPr>
-        </p:nvGraphicFramePr>
-        <p:xfrm>
-          <a:off x="5619750" y="965200"/>
-          <a:ext cx="5607050" cy="4927600"/>
-        </p:xfrm>
-        <a:graphic>
-          <a:graphicData uri="http://schemas.openxmlformats.org/drawingml/2006/diagram">
-            <dgm:relIds xmlns:dgm="http://schemas.openxmlformats.org/drawingml/2006/diagram" xmlns:r="http://schemas.openxmlformats.org/officeDocument/2006/relationships" r:dm="rId2" r:lo="rId3" r:qs="rId4" r:cs="rId5"/>
-          </a:graphicData>
-        </a:graphic>
-      </p:graphicFrame>
     </p:spTree>
     <p:extLst>
       <p:ext uri="{BB962C8B-B14F-4D97-AF65-F5344CB8AC3E}">
@@ -52002,7 +51500,7 @@
             <a:r>
               <a:rPr lang="en-GB" sz="3600" cap="none" dirty="0">
                 <a:solidFill>
-                  <a:schemeClr val="accent3"/>
+                  <a:srgbClr val="000000"/>
                 </a:solidFill>
                 <a:latin typeface="Times" charset="0"/>
                 <a:ea typeface="Times" charset="0"/>
@@ -52412,7 +51910,7 @@
             <a:r>
               <a:rPr lang="en-US" sz="2200" dirty="0">
                 <a:solidFill>
-                  <a:schemeClr val="accent3"/>
+                  <a:srgbClr val="000000"/>
                 </a:solidFill>
                 <a:latin typeface="Times" pitchFamily="2" charset="0"/>
                 <a:ea typeface="Times" charset="0"/>
@@ -52605,22 +52103,22 @@
         <a:srgbClr val="000000"/>
       </a:dk1>
       <a:lt1>
-        <a:srgbClr val="FFFFFF"/>
+        <a:srgbClr val="EAF2FB"/>
       </a:lt1>
       <a:dk2>
-        <a:srgbClr val="4A5356"/>
+        <a:srgbClr val="1F3864"/>
       </a:dk2>
       <a:lt2>
-        <a:srgbClr val="E8E3CE"/>
+        <a:srgbClr val="DEEBF7"/>
       </a:lt2>
       <a:accent1>
-        <a:srgbClr val="F6A21D"/>
+        <a:srgbClr val="5B9BD5"/>
       </a:accent1>
       <a:accent2>
-        <a:srgbClr val="9BAFB5"/>
+        <a:srgbClr val="2E74B5"/>
       </a:accent2>
       <a:accent3>
-        <a:srgbClr val="C96731"/>
+        <a:srgbClr val="1F4E79"/>
       </a:accent3>
       <a:accent4>
         <a:srgbClr val="9CA383"/>
